--- a/docs/proposal/操作イメージ.pptx
+++ b/docs/proposal/操作イメージ.pptx
@@ -260,7 +260,7 @@
           <a:p>
             <a:fld id="{BD2F1415-D1CA-4FF3-A594-58229DFFD8EF}" type="datetimeFigureOut">
               <a:rPr kumimoji="1" lang="ja-JP" altLang="en-US" smtClean="0"/>
-              <a:t>2026/3/25</a:t>
+              <a:t>2026/3/26</a:t>
             </a:fld>
             <a:endParaRPr kumimoji="1" lang="ja-JP" altLang="en-US"/>
           </a:p>
@@ -490,7 +490,7 @@
           <a:p>
             <a:fld id="{BD2F1415-D1CA-4FF3-A594-58229DFFD8EF}" type="datetimeFigureOut">
               <a:rPr kumimoji="1" lang="ja-JP" altLang="en-US" smtClean="0"/>
-              <a:t>2026/3/25</a:t>
+              <a:t>2026/3/26</a:t>
             </a:fld>
             <a:endParaRPr kumimoji="1" lang="ja-JP" altLang="en-US"/>
           </a:p>
@@ -730,7 +730,7 @@
           <a:p>
             <a:fld id="{BD2F1415-D1CA-4FF3-A594-58229DFFD8EF}" type="datetimeFigureOut">
               <a:rPr kumimoji="1" lang="ja-JP" altLang="en-US" smtClean="0"/>
-              <a:t>2026/3/25</a:t>
+              <a:t>2026/3/26</a:t>
             </a:fld>
             <a:endParaRPr kumimoji="1" lang="ja-JP" altLang="en-US"/>
           </a:p>
@@ -960,7 +960,7 @@
           <a:p>
             <a:fld id="{BD2F1415-D1CA-4FF3-A594-58229DFFD8EF}" type="datetimeFigureOut">
               <a:rPr kumimoji="1" lang="ja-JP" altLang="en-US" smtClean="0"/>
-              <a:t>2026/3/25</a:t>
+              <a:t>2026/3/26</a:t>
             </a:fld>
             <a:endParaRPr kumimoji="1" lang="ja-JP" altLang="en-US"/>
           </a:p>
@@ -1235,7 +1235,7 @@
           <a:p>
             <a:fld id="{BD2F1415-D1CA-4FF3-A594-58229DFFD8EF}" type="datetimeFigureOut">
               <a:rPr kumimoji="1" lang="ja-JP" altLang="en-US" smtClean="0"/>
-              <a:t>2026/3/25</a:t>
+              <a:t>2026/3/26</a:t>
             </a:fld>
             <a:endParaRPr kumimoji="1" lang="ja-JP" altLang="en-US"/>
           </a:p>
@@ -1564,7 +1564,7 @@
           <a:p>
             <a:fld id="{BD2F1415-D1CA-4FF3-A594-58229DFFD8EF}" type="datetimeFigureOut">
               <a:rPr kumimoji="1" lang="ja-JP" altLang="en-US" smtClean="0"/>
-              <a:t>2026/3/25</a:t>
+              <a:t>2026/3/26</a:t>
             </a:fld>
             <a:endParaRPr kumimoji="1" lang="ja-JP" altLang="en-US"/>
           </a:p>
@@ -2040,7 +2040,7 @@
           <a:p>
             <a:fld id="{BD2F1415-D1CA-4FF3-A594-58229DFFD8EF}" type="datetimeFigureOut">
               <a:rPr kumimoji="1" lang="ja-JP" altLang="en-US" smtClean="0"/>
-              <a:t>2026/3/25</a:t>
+              <a:t>2026/3/26</a:t>
             </a:fld>
             <a:endParaRPr kumimoji="1" lang="ja-JP" altLang="en-US"/>
           </a:p>
@@ -2181,7 +2181,7 @@
           <a:p>
             <a:fld id="{BD2F1415-D1CA-4FF3-A594-58229DFFD8EF}" type="datetimeFigureOut">
               <a:rPr kumimoji="1" lang="ja-JP" altLang="en-US" smtClean="0"/>
-              <a:t>2026/3/25</a:t>
+              <a:t>2026/3/26</a:t>
             </a:fld>
             <a:endParaRPr kumimoji="1" lang="ja-JP" altLang="en-US"/>
           </a:p>
@@ -2294,7 +2294,7 @@
           <a:p>
             <a:fld id="{BD2F1415-D1CA-4FF3-A594-58229DFFD8EF}" type="datetimeFigureOut">
               <a:rPr kumimoji="1" lang="ja-JP" altLang="en-US" smtClean="0"/>
-              <a:t>2026/3/25</a:t>
+              <a:t>2026/3/26</a:t>
             </a:fld>
             <a:endParaRPr kumimoji="1" lang="ja-JP" altLang="en-US"/>
           </a:p>
@@ -2637,7 +2637,7 @@
           <a:p>
             <a:fld id="{BD2F1415-D1CA-4FF3-A594-58229DFFD8EF}" type="datetimeFigureOut">
               <a:rPr kumimoji="1" lang="ja-JP" altLang="en-US" smtClean="0"/>
-              <a:t>2026/3/25</a:t>
+              <a:t>2026/3/26</a:t>
             </a:fld>
             <a:endParaRPr kumimoji="1" lang="ja-JP" altLang="en-US"/>
           </a:p>
@@ -2925,7 +2925,7 @@
           <a:p>
             <a:fld id="{BD2F1415-D1CA-4FF3-A594-58229DFFD8EF}" type="datetimeFigureOut">
               <a:rPr kumimoji="1" lang="ja-JP" altLang="en-US" smtClean="0"/>
-              <a:t>2026/3/25</a:t>
+              <a:t>2026/3/26</a:t>
             </a:fld>
             <a:endParaRPr kumimoji="1" lang="ja-JP" altLang="en-US"/>
           </a:p>
@@ -3198,7 +3198,7 @@
           <a:p>
             <a:fld id="{BD2F1415-D1CA-4FF3-A594-58229DFFD8EF}" type="datetimeFigureOut">
               <a:rPr kumimoji="1" lang="ja-JP" altLang="en-US" smtClean="0"/>
-              <a:t>2026/3/25</a:t>
+              <a:t>2026/3/26</a:t>
             </a:fld>
             <a:endParaRPr kumimoji="1" lang="ja-JP" altLang="en-US"/>
           </a:p>
@@ -4633,7 +4633,7 @@
         </p:nvGrpSpPr>
         <p:grpSpPr>
           <a:xfrm>
-            <a:off x="442625" y="1960847"/>
+            <a:off x="442625" y="2469736"/>
             <a:ext cx="2039510" cy="296849"/>
             <a:chOff x="1550505" y="1930841"/>
             <a:chExt cx="2039510" cy="296849"/>
@@ -5004,7 +5004,7 @@
         </p:nvGrpSpPr>
         <p:grpSpPr>
           <a:xfrm>
-            <a:off x="442625" y="2372989"/>
+            <a:off x="442625" y="2881878"/>
             <a:ext cx="2039510" cy="296849"/>
             <a:chOff x="1550505" y="1930841"/>
             <a:chExt cx="2039510" cy="296849"/>
@@ -8940,6 +8940,157 @@
           </a:p>
         </p:txBody>
       </p:sp>
+      <p:grpSp>
+        <p:nvGrpSpPr>
+          <p:cNvPr id="110" name="グループ化 109">
+            <a:extLst>
+              <a:ext uri="{FF2B5EF4-FFF2-40B4-BE49-F238E27FC236}">
+                <a16:creationId xmlns:a16="http://schemas.microsoft.com/office/drawing/2014/main" id="{7129C240-9393-4C46-AB78-5C40274E8DF4}"/>
+              </a:ext>
+            </a:extLst>
+          </p:cNvPr>
+          <p:cNvGrpSpPr/>
+          <p:nvPr/>
+        </p:nvGrpSpPr>
+        <p:grpSpPr>
+          <a:xfrm>
+            <a:off x="442625" y="2076140"/>
+            <a:ext cx="2039510" cy="296849"/>
+            <a:chOff x="1550505" y="1930841"/>
+            <a:chExt cx="2039510" cy="296849"/>
+          </a:xfrm>
+          <a:solidFill>
+            <a:schemeClr val="bg1">
+              <a:lumMod val="95000"/>
+            </a:schemeClr>
+          </a:solidFill>
+        </p:grpSpPr>
+        <p:sp>
+          <p:nvSpPr>
+            <p:cNvPr id="112" name="四角形: 角を丸くする 111">
+              <a:extLst>
+                <a:ext uri="{FF2B5EF4-FFF2-40B4-BE49-F238E27FC236}">
+                  <a16:creationId xmlns:a16="http://schemas.microsoft.com/office/drawing/2014/main" id="{91C36F9D-8D50-4917-8CD6-264F0EF58663}"/>
+                </a:ext>
+              </a:extLst>
+            </p:cNvPr>
+            <p:cNvSpPr/>
+            <p:nvPr/>
+          </p:nvSpPr>
+          <p:spPr>
+            <a:xfrm>
+              <a:off x="1550505" y="1930841"/>
+              <a:ext cx="2039510" cy="296849"/>
+            </a:xfrm>
+            <a:prstGeom prst="roundRect">
+              <a:avLst/>
+            </a:prstGeom>
+            <a:grpFill/>
+            <a:ln w="6350">
+              <a:solidFill>
+                <a:schemeClr val="tx1"/>
+              </a:solidFill>
+            </a:ln>
+          </p:spPr>
+          <p:style>
+            <a:lnRef idx="2">
+              <a:schemeClr val="accent1">
+                <a:shade val="50000"/>
+              </a:schemeClr>
+            </a:lnRef>
+            <a:fillRef idx="1">
+              <a:schemeClr val="accent1"/>
+            </a:fillRef>
+            <a:effectRef idx="0">
+              <a:schemeClr val="accent1"/>
+            </a:effectRef>
+            <a:fontRef idx="minor">
+              <a:schemeClr val="lt1"/>
+            </a:fontRef>
+          </p:style>
+          <p:txBody>
+            <a:bodyPr rtlCol="0" anchor="ctr"/>
+            <a:lstStyle/>
+            <a:p>
+              <a:r>
+                <a:rPr kumimoji="1" lang="ja-JP" altLang="en-US" sz="1200" dirty="0">
+                  <a:solidFill>
+                    <a:schemeClr val="tx1"/>
+                  </a:solidFill>
+                  <a:latin typeface="MS UI Gothic" panose="020B0600070205080204" pitchFamily="50" charset="-128"/>
+                  <a:ea typeface="MS UI Gothic" panose="020B0600070205080204" pitchFamily="50" charset="-128"/>
+                </a:rPr>
+                <a:t>秋田支店</a:t>
+              </a:r>
+            </a:p>
+          </p:txBody>
+        </p:sp>
+        <p:sp>
+          <p:nvSpPr>
+            <p:cNvPr id="114" name="四角形: 角を丸くする 113">
+              <a:extLst>
+                <a:ext uri="{FF2B5EF4-FFF2-40B4-BE49-F238E27FC236}">
+                  <a16:creationId xmlns:a16="http://schemas.microsoft.com/office/drawing/2014/main" id="{35A13E4A-0044-400B-8066-17D5A98FBDB5}"/>
+                </a:ext>
+              </a:extLst>
+            </p:cNvPr>
+            <p:cNvSpPr/>
+            <p:nvPr/>
+          </p:nvSpPr>
+          <p:spPr>
+            <a:xfrm>
+              <a:off x="3317020" y="1940117"/>
+              <a:ext cx="272995" cy="243840"/>
+            </a:xfrm>
+            <a:prstGeom prst="roundRect">
+              <a:avLst/>
+            </a:prstGeom>
+            <a:grpFill/>
+            <a:ln w="6350">
+              <a:noFill/>
+            </a:ln>
+          </p:spPr>
+          <p:style>
+            <a:lnRef idx="2">
+              <a:schemeClr val="accent1">
+                <a:shade val="50000"/>
+              </a:schemeClr>
+            </a:lnRef>
+            <a:fillRef idx="1">
+              <a:schemeClr val="accent1"/>
+            </a:fillRef>
+            <a:effectRef idx="0">
+              <a:schemeClr val="accent1"/>
+            </a:effectRef>
+            <a:fontRef idx="minor">
+              <a:schemeClr val="lt1"/>
+            </a:fontRef>
+          </p:style>
+          <p:txBody>
+            <a:bodyPr rtlCol="0" anchor="ctr"/>
+            <a:lstStyle/>
+            <a:p>
+              <a:r>
+                <a:rPr lang="en-US" altLang="ja-JP" sz="1200" dirty="0">
+                  <a:solidFill>
+                    <a:schemeClr val="tx1"/>
+                  </a:solidFill>
+                  <a:latin typeface="MS UI Gothic" panose="020B0600070205080204" pitchFamily="50" charset="-128"/>
+                  <a:ea typeface="MS UI Gothic" panose="020B0600070205080204" pitchFamily="50" charset="-128"/>
+                </a:rPr>
+                <a:t>v</a:t>
+              </a:r>
+              <a:endParaRPr kumimoji="1" lang="ja-JP" altLang="en-US" sz="1200" dirty="0">
+                <a:solidFill>
+                  <a:schemeClr val="tx1"/>
+                </a:solidFill>
+                <a:latin typeface="MS UI Gothic" panose="020B0600070205080204" pitchFamily="50" charset="-128"/>
+                <a:ea typeface="MS UI Gothic" panose="020B0600070205080204" pitchFamily="50" charset="-128"/>
+              </a:endParaRPr>
+            </a:p>
+          </p:txBody>
+        </p:sp>
+      </p:grpSp>
     </p:spTree>
     <p:extLst>
       <p:ext uri="{BB962C8B-B14F-4D97-AF65-F5344CB8AC3E}">
@@ -9043,7 +9194,7 @@
         </p:nvSpPr>
         <p:spPr>
           <a:xfrm>
-            <a:off x="4912659" y="354945"/>
+            <a:off x="4912659" y="160141"/>
             <a:ext cx="5948082" cy="268736"/>
           </a:xfrm>
           <a:prstGeom prst="rect">
@@ -9147,19 +9298,65 @@
           <a:bodyPr rtlCol="0" anchor="t" anchorCtr="0"/>
           <a:lstStyle/>
           <a:p>
+            <a:endParaRPr lang="en-US" altLang="ja-JP" sz="1600" b="1" dirty="0">
+              <a:solidFill>
+                <a:schemeClr val="tx1"/>
+              </a:solidFill>
+              <a:latin typeface="Ubuntu Mono Medium" panose="020B0309030602030204" pitchFamily="49" charset="0"/>
+              <a:ea typeface="851ゴチカクット" panose="02000600000000000000" pitchFamily="2" charset="-128"/>
+            </a:endParaRPr>
+          </a:p>
+          <a:p>
+            <a:pPr algn="ctr"/>
+            <a:r>
+              <a:rPr lang="en-US" altLang="ja-JP" sz="2000" b="1" dirty="0">
+                <a:solidFill>
+                  <a:schemeClr val="tx1"/>
+                </a:solidFill>
+                <a:latin typeface="Ubuntu Mono Medium" panose="020B0309030602030204" pitchFamily="49" charset="0"/>
+                <a:ea typeface="851ゴチカクット" panose="02000600000000000000" pitchFamily="2" charset="-128"/>
+              </a:rPr>
+              <a:t>Truck</a:t>
+            </a:r>
+            <a:r>
+              <a:rPr lang="ja-JP" altLang="en-US" sz="2000" b="1" dirty="0">
+                <a:solidFill>
+                  <a:schemeClr val="tx1"/>
+                </a:solidFill>
+                <a:latin typeface="Ubuntu Mono Medium" panose="020B0309030602030204" pitchFamily="49" charset="0"/>
+                <a:ea typeface="851ゴチカクット" panose="02000600000000000000" pitchFamily="2" charset="-128"/>
+              </a:rPr>
+              <a:t> </a:t>
+            </a:r>
+            <a:r>
+              <a:rPr lang="en-US" altLang="ja-JP" sz="2000" b="1" dirty="0">
+                <a:solidFill>
+                  <a:schemeClr val="tx1"/>
+                </a:solidFill>
+                <a:latin typeface="Ubuntu Mono Medium" panose="020B0309030602030204" pitchFamily="49" charset="0"/>
+                <a:ea typeface="851ゴチカクット" panose="02000600000000000000" pitchFamily="2" charset="-128"/>
+              </a:rPr>
+              <a:t>Tracker</a:t>
+            </a:r>
+            <a:endParaRPr lang="ja-JP" altLang="en-US" sz="2000" b="1" dirty="0">
+              <a:solidFill>
+                <a:schemeClr val="tx1"/>
+              </a:solidFill>
+              <a:latin typeface="Ubuntu Mono Medium" panose="020B0309030602030204" pitchFamily="49" charset="0"/>
+              <a:ea typeface="851ゴチカクット" panose="02000600000000000000" pitchFamily="2" charset="-128"/>
+            </a:endParaRPr>
+          </a:p>
+          <a:p>
             <a:pPr algn="ctr">
               <a:lnSpc>
                 <a:spcPct val="200000"/>
               </a:lnSpc>
             </a:pPr>
-            <a:r>
-              <a:rPr kumimoji="1" lang="ja-JP" altLang="en-US" sz="2400" dirty="0">
-                <a:solidFill>
-                  <a:schemeClr val="tx1"/>
-                </a:solidFill>
-              </a:rPr>
-              <a:t>秋田支店</a:t>
-            </a:r>
+            <a:endParaRPr kumimoji="1" lang="en-US" altLang="ja-JP" sz="1200" dirty="0">
+              <a:solidFill>
+                <a:schemeClr val="tx1"/>
+              </a:solidFill>
+            </a:endParaRPr>
           </a:p>
           <a:p>
             <a:pPr algn="ctr">
@@ -9167,7 +9364,7 @@
                 <a:spcPct val="200000"/>
               </a:lnSpc>
             </a:pPr>
-            <a:endParaRPr kumimoji="1" lang="en-US" altLang="ja-JP" dirty="0">
+            <a:endParaRPr lang="en-US" altLang="ja-JP" sz="1200" dirty="0">
               <a:solidFill>
                 <a:schemeClr val="tx1"/>
               </a:solidFill>
@@ -9199,6 +9396,14 @@
                 <a:spcPct val="200000"/>
               </a:lnSpc>
             </a:pPr>
+            <a:r>
+              <a:rPr kumimoji="1" lang="en-US" altLang="ja-JP" sz="1200" dirty="0">
+                <a:solidFill>
+                  <a:schemeClr val="tx1"/>
+                </a:solidFill>
+              </a:rPr>
+              <a:t>CSV</a:t>
+            </a:r>
             <a:r>
               <a:rPr kumimoji="1" lang="ja-JP" altLang="en-US" sz="1200" dirty="0">
                 <a:solidFill>
@@ -9365,12 +9570,12 @@
           <a:p>
             <a:pPr algn="ctr"/>
             <a:r>
-              <a:rPr kumimoji="1" lang="en-US" altLang="ja-JP" sz="4000" b="1" dirty="0">
+              <a:rPr lang="en-US" altLang="ja-JP" sz="4000" b="1" dirty="0">
                 <a:solidFill>
                   <a:schemeClr val="tx1"/>
                 </a:solidFill>
               </a:rPr>
-              <a:t>5</a:t>
+              <a:t>3</a:t>
             </a:r>
             <a:r>
               <a:rPr kumimoji="1" lang="ja-JP" altLang="en-US" sz="4000" b="1" dirty="0">
@@ -9455,12 +9660,12 @@
           <a:p>
             <a:pPr algn="ctr"/>
             <a:r>
-              <a:rPr lang="en-US" altLang="ja-JP" sz="4000" b="1" dirty="0">
+              <a:rPr kumimoji="1" lang="en-US" altLang="ja-JP" sz="4000" b="1" dirty="0">
                 <a:solidFill>
                   <a:schemeClr val="tx1"/>
                 </a:solidFill>
               </a:rPr>
-              <a:t>2</a:t>
+              <a:t>1</a:t>
             </a:r>
             <a:r>
               <a:rPr kumimoji="1" lang="ja-JP" altLang="en-US" sz="4000" dirty="0">
@@ -9631,31 +9836,47 @@
               <a:t>本日配達状況  </a:t>
             </a:r>
             <a:r>
-              <a:rPr lang="en-US" altLang="ja-JP" sz="4000" b="1" dirty="0">
+              <a:rPr kumimoji="1" lang="en-US" altLang="ja-JP" sz="2800" b="1" dirty="0">
                 <a:solidFill>
                   <a:schemeClr val="tx1"/>
                 </a:solidFill>
               </a:rPr>
-              <a:t>12</a:t>
-            </a:r>
-            <a:r>
-              <a:rPr lang="ja-JP" altLang="en-US" sz="4000" b="1" dirty="0">
+              <a:t>1</a:t>
+            </a:r>
+            <a:r>
+              <a:rPr lang="en-US" altLang="ja-JP" sz="2800" b="1" dirty="0">
                 <a:solidFill>
                   <a:schemeClr val="tx1"/>
                 </a:solidFill>
               </a:rPr>
+              <a:t>6</a:t>
+            </a:r>
+            <a:r>
+              <a:rPr kumimoji="1" lang="ja-JP" altLang="en-US" sz="4000" dirty="0">
+                <a:solidFill>
+                  <a:schemeClr val="tx1"/>
+                </a:solidFill>
+              </a:rPr>
               <a:t> </a:t>
             </a:r>
             <a:r>
-              <a:rPr lang="en-US" altLang="ja-JP" sz="4000" b="1" dirty="0">
+              <a:rPr kumimoji="1" lang="ja-JP" altLang="en-US" dirty="0">
                 <a:solidFill>
                   <a:schemeClr val="tx1"/>
                 </a:solidFill>
               </a:rPr>
+              <a:t>件 </a:t>
+            </a:r>
+            <a:r>
+              <a:rPr kumimoji="1" lang="en-US" altLang="ja-JP" dirty="0">
+                <a:solidFill>
+                  <a:schemeClr val="tx1"/>
+                </a:solidFill>
+              </a:rPr>
               <a:t>/</a:t>
             </a:r>
             <a:r>
-              <a:rPr lang="ja-JP" altLang="en-US" sz="4000" b="1" dirty="0">
+              <a:rPr kumimoji="1" lang="ja-JP" altLang="en-US" dirty="0">
                 <a:solidFill>
                   <a:schemeClr val="tx1"/>
                 </a:solidFill>
@@ -9663,15 +9884,15 @@
               <a:t> </a:t>
             </a:r>
             <a:r>
-              <a:rPr lang="en-US" altLang="ja-JP" sz="2800" b="1" dirty="0">
+              <a:rPr kumimoji="1" lang="en-US" altLang="ja-JP" sz="2800" b="1" dirty="0">
                 <a:solidFill>
                   <a:schemeClr val="tx1"/>
                 </a:solidFill>
               </a:rPr>
-              <a:t>56</a:t>
-            </a:r>
-            <a:r>
-              <a:rPr kumimoji="1" lang="ja-JP" altLang="en-US" sz="4000" dirty="0">
+              <a:t>321</a:t>
+            </a:r>
+            <a:r>
+              <a:rPr kumimoji="1" lang="ja-JP" altLang="en-US" dirty="0">
                 <a:solidFill>
                   <a:schemeClr val="tx1"/>
                 </a:solidFill>
@@ -9679,13 +9900,18 @@
               <a:t> </a:t>
             </a:r>
             <a:r>
-              <a:rPr kumimoji="1" lang="ja-JP" altLang="en-US" dirty="0">
+              <a:rPr kumimoji="1" lang="en-US" altLang="ja-JP" dirty="0">
                 <a:solidFill>
                   <a:schemeClr val="tx1"/>
                 </a:solidFill>
               </a:rPr>
-              <a:t>件</a:t>
-            </a:r>
+              <a:t>kg</a:t>
+            </a:r>
+            <a:endParaRPr kumimoji="1" lang="ja-JP" altLang="en-US" dirty="0">
+              <a:solidFill>
+                <a:schemeClr val="tx1"/>
+              </a:solidFill>
+            </a:endParaRPr>
           </a:p>
         </p:txBody>
       </p:sp>
@@ -10559,7 +10785,7 @@
         </p:nvSpPr>
         <p:spPr>
           <a:xfrm>
-            <a:off x="1454934" y="354945"/>
+            <a:off x="1454934" y="160141"/>
             <a:ext cx="5948082" cy="268736"/>
           </a:xfrm>
           <a:prstGeom prst="rect">
@@ -10591,30 +10817,102 @@
           <a:bodyPr rtlCol="0" anchor="ctr"/>
           <a:lstStyle/>
           <a:p>
-            <a:r>
-              <a:rPr lang="en-US" altLang="ja-JP" sz="1600" b="1" dirty="0">
-                <a:latin typeface="Ubuntu Mono Medium" panose="020B0309030602030204" pitchFamily="49" charset="0"/>
-                <a:ea typeface="851ゴチカクット" panose="02000600000000000000" pitchFamily="2" charset="-128"/>
-              </a:rPr>
-              <a:t>Truck</a:t>
-            </a:r>
-            <a:r>
-              <a:rPr lang="ja-JP" altLang="en-US" sz="1600" b="1" dirty="0">
-                <a:latin typeface="Ubuntu Mono Medium" panose="020B0309030602030204" pitchFamily="49" charset="0"/>
-                <a:ea typeface="851ゴチカクット" panose="02000600000000000000" pitchFamily="2" charset="-128"/>
-              </a:rPr>
-              <a:t> </a:t>
-            </a:r>
-            <a:r>
-              <a:rPr lang="en-US" altLang="ja-JP" sz="1600" b="1" dirty="0">
-                <a:latin typeface="Ubuntu Mono Medium" panose="020B0309030602030204" pitchFamily="49" charset="0"/>
-                <a:ea typeface="851ゴチカクット" panose="02000600000000000000" pitchFamily="2" charset="-128"/>
-              </a:rPr>
-              <a:t>Tracker</a:t>
-            </a:r>
             <a:endParaRPr kumimoji="1" lang="ja-JP" altLang="en-US" sz="1600" b="1" dirty="0">
               <a:latin typeface="Ubuntu Mono Medium" panose="020B0309030602030204" pitchFamily="49" charset="0"/>
               <a:ea typeface="851ゴチカクット" panose="02000600000000000000" pitchFamily="2" charset="-128"/>
+            </a:endParaRPr>
+          </a:p>
+        </p:txBody>
+      </p:sp>
+      <p:sp>
+        <p:nvSpPr>
+          <p:cNvPr id="28" name="正方形/長方形 27">
+            <a:extLst>
+              <a:ext uri="{FF2B5EF4-FFF2-40B4-BE49-F238E27FC236}">
+                <a16:creationId xmlns:a16="http://schemas.microsoft.com/office/drawing/2014/main" id="{0FA00D5D-C708-4738-A19B-0C768C043F0A}"/>
+              </a:ext>
+            </a:extLst>
+          </p:cNvPr>
+          <p:cNvSpPr/>
+          <p:nvPr/>
+        </p:nvSpPr>
+        <p:spPr>
+          <a:xfrm>
+            <a:off x="1454934" y="428877"/>
+            <a:ext cx="9405806" cy="268736"/>
+          </a:xfrm>
+          <a:prstGeom prst="rect">
+            <a:avLst/>
+          </a:prstGeom>
+          <a:solidFill>
+            <a:schemeClr val="bg1"/>
+          </a:solidFill>
+          <a:ln>
+            <a:solidFill>
+              <a:schemeClr val="accent1"/>
+            </a:solidFill>
+          </a:ln>
+        </p:spPr>
+        <p:style>
+          <a:lnRef idx="2">
+            <a:schemeClr val="accent1">
+              <a:shade val="50000"/>
+            </a:schemeClr>
+          </a:lnRef>
+          <a:fillRef idx="1">
+            <a:schemeClr val="accent1"/>
+          </a:fillRef>
+          <a:effectRef idx="0">
+            <a:schemeClr val="accent1"/>
+          </a:effectRef>
+          <a:fontRef idx="minor">
+            <a:schemeClr val="lt1"/>
+          </a:fontRef>
+        </p:style>
+        <p:txBody>
+          <a:bodyPr rtlCol="0" anchor="ctr"/>
+          <a:lstStyle/>
+          <a:p>
+            <a:r>
+              <a:rPr kumimoji="1" lang="ja-JP" altLang="en-US" sz="1600" b="1" dirty="0">
+                <a:solidFill>
+                  <a:schemeClr val="tx1"/>
+                </a:solidFill>
+                <a:latin typeface="游ゴシック" panose="020B0400000000000000" pitchFamily="50" charset="-128"/>
+                <a:ea typeface="游ゴシック" panose="020B0400000000000000" pitchFamily="50" charset="-128"/>
+                <a:cs typeface="Aharoni" panose="02010803020104030203" pitchFamily="2" charset="-79"/>
+              </a:rPr>
+              <a:t>＜   ＞    〇    ｜</a:t>
+            </a:r>
+            <a:r>
+              <a:rPr kumimoji="1" lang="en-US" altLang="ja-JP" sz="1100" dirty="0">
+                <a:solidFill>
+                  <a:schemeClr val="tx1"/>
+                </a:solidFill>
+                <a:latin typeface="游ゴシック" panose="020B0400000000000000" pitchFamily="50" charset="-128"/>
+                <a:ea typeface="游ゴシック" panose="020B0400000000000000" pitchFamily="50" charset="-128"/>
+                <a:cs typeface="Aharoni" panose="02010803020104030203" pitchFamily="2" charset="-79"/>
+              </a:rPr>
+              <a:t>https://</a:t>
+            </a:r>
+            <a:r>
+              <a:rPr lang="en-US" altLang="ja-JP" sz="1100" dirty="0">
+                <a:solidFill>
+                  <a:schemeClr val="tx1"/>
+                </a:solidFill>
+                <a:latin typeface="游ゴシック" panose="020B0400000000000000" pitchFamily="50" charset="-128"/>
+                <a:ea typeface="游ゴシック" panose="020B0400000000000000" pitchFamily="50" charset="-128"/>
+                <a:cs typeface="Aharoni" panose="02010803020104030203" pitchFamily="2" charset="-79"/>
+              </a:rPr>
+              <a:t>abcdefg.co.jp</a:t>
+            </a:r>
+            <a:endParaRPr kumimoji="1" lang="ja-JP" altLang="en-US" sz="1100" dirty="0">
+              <a:solidFill>
+                <a:schemeClr val="tx1"/>
+              </a:solidFill>
+              <a:latin typeface="游ゴシック" panose="020B0400000000000000" pitchFamily="50" charset="-128"/>
+              <a:ea typeface="游ゴシック" panose="020B0400000000000000" pitchFamily="50" charset="-128"/>
+              <a:cs typeface="Aharoni" panose="02010803020104030203" pitchFamily="2" charset="-79"/>
             </a:endParaRPr>
           </a:p>
         </p:txBody>
